--- a/samples/sample.pptx
+++ b/samples/sample.pptx
@@ -3735,7 +3735,7 @@
             </a:r>
             <a:r>
               <a:rPr lang="en-US" altLang="ja-JP" sz="1800" u="sng" dirty="0"/>
-              <a:t>https://img.shields.io/github/stars/NAOHIDEOTA/documelt?style=social</a:t>
+              <a:t>https://img.shields.io/github/stars/naohidden/documelt?style=social</a:t>
             </a:r>
             <a:r>
               <a:rPr lang="en-US" altLang="ja-JP" sz="1800" dirty="0"/>
@@ -3743,7 +3743,7 @@
             </a:r>
             <a:r>
               <a:rPr lang="en-US" altLang="ja-JP" sz="1800" u="sng" dirty="0"/>
-              <a:t>https://github.com/NAOHIDEOTA/documelt</a:t>
+              <a:t>https://github.com/naohidden/documelt</a:t>
             </a:r>
             <a:r>
               <a:rPr lang="en-US" altLang="ja-JP" sz="1800" dirty="0"/>
@@ -6499,7 +6499,7 @@
             </a:r>
             <a:r>
               <a:rPr lang="en-US" altLang="ja-JP" sz="700" u="sng" dirty="0"/>
-              <a:t>https://github.com/NAOHIDEOTA/documelt/issues</a:t>
+              <a:t>https://github.com/naohidden/documelt/issues</a:t>
             </a:r>
             <a:r>
               <a:rPr lang="en-US" altLang="ja-JP" sz="700" dirty="0"/>
@@ -6541,7 +6541,7 @@
             </a:r>
             <a:r>
               <a:rPr lang="en-US" altLang="ja-JP" sz="700" dirty="0"/>
-              <a:t>) - Copyright (c) 2026 NAOHIDEOTA</a:t>
+              <a:t>) - Copyright (c) 2026 naohidden</a:t>
             </a:r>
           </a:p>
         </p:txBody>
